--- a/public/fun/pack/pptx/newspro/카드뉴스프리미엄_46_알뜰생활팁_로즈쿼츠.pptx
+++ b/public/fun/pack/pptx/newspro/카드뉴스프리미엄_46_알뜰생활팁_로즈쿼츠.pptx
@@ -113,12 +113,12 @@
   <p:extLst>
     <p:ext uri="{521415D9-36F7-43E2-AB2F-B90AF26B5E84}">
       <p14:sectionLst xmlns:p14="http://schemas.microsoft.com/office/powerpoint/2010/main">
-        <p14:section name="시작" id="{6E7E1B1B-EBB7-4082-87F8-F98064EE16F3}">
+        <p14:section name="시작" id="{5770AFB1-9426-4DCF-B80E-26271A5A044D}">
           <p14:sldIdLst>
             <p14:sldId id="256"/>
           </p14:sldIdLst>
         </p14:section>
-        <p14:section name="본문" id="{1CFF5E65-B285-4AAA-A70D-B89D73EC9358}">
+        <p14:section name="본문" id="{7F29CBC8-C2C0-4CAC-A2B3-CE3AD52AFDF3}">
           <p14:sldIdLst>
             <p14:sldId id="257"/>
             <p14:sldId id="258"/>
@@ -127,7 +127,7 @@
             <p14:sldId id="261"/>
           </p14:sldIdLst>
         </p14:section>
-        <p14:section name="마무리" id="{58730EE0-7681-456F-AA9D-A844FB5673D6}">
+        <p14:section name="마무리" id="{F7F1AB11-E89C-4351-A988-CDF6CC033CCA}">
           <p14:sldIdLst>
             <p14:sldId id="262"/>
           </p14:sldIdLst>
@@ -1474,7 +1474,7 @@
             </a:lvl1pPr>
           </a:lstStyle>
           <a:p>
-            <a:fld id="{2C54B7FB-BC87-4846-B185-D43D2A683DDC}" type="slidenum">
+            <a:fld id="{8A272838-092F-42B1-A781-037F46852E4A}" type="slidenum">
               <a:rPr lang="en-US"/>
               <a:t>‹#›</a:t>
             </a:fld>
@@ -2090,7 +2090,7 @@
             </a:lvl1pPr>
           </a:lstStyle>
           <a:p>
-            <a:fld id="{D01E9F8B-AEDD-449A-AEEA-702B337E1CA8}" type="slidenum">
+            <a:fld id="{28536573-26B5-4215-A8DB-CC23DAAEE50D}" type="slidenum">
               <a:rPr lang="en-US"/>
               <a:t>‹#›</a:t>
             </a:fld>
@@ -2768,7 +2768,7 @@
             </a:lvl1pPr>
           </a:lstStyle>
           <a:p>
-            <a:fld id="{C571E0FA-4C39-480B-9CB3-AC3047F38583}" type="slidenum">
+            <a:fld id="{D9F279F1-7D3D-46C1-8F5F-2CE07EED1CA1}" type="slidenum">
               <a:rPr lang="en-US"/>
               <a:t>‹#›</a:t>
             </a:fld>
@@ -3587,7 +3587,7 @@
           <a:p>
             <a:r>
               <a:rPr lang="ko-KR"/>
-              <a:t>새해 가계부 쓰기 시작하는 법</a:t>
+              <a:t>가계부 쓰기 시작하는 법</a:t>
             </a:r>
           </a:p>
         </p:txBody>
@@ -3716,7 +3716,7 @@
           <a:bodyPr/>
           <a:lstStyle/>
           <a:p>
-            <a:fld id="{DBDBD2A2-3063-42D1-A804-1AD52BE69521}" type="slidenum">
+            <a:fld id="{D0D739D3-7F17-47C0-80DC-5EDA880F6CFD}" type="slidenum">
               <a:rPr lang="en-US"/>
               <a:t>‹#›</a:t>
             </a:fld>
@@ -3882,7 +3882,7 @@
           <a:bodyPr/>
           <a:lstStyle/>
           <a:p>
-            <a:fld id="{6ED7B976-C975-4E54-84ED-500C4FFFFFD8}" type="slidenum">
+            <a:fld id="{E7EFFF0B-7410-47A0-B74D-AAD6DA75FCB4}" type="slidenum">
               <a:rPr lang="en-US"/>
               <a:t>‹#›</a:t>
             </a:fld>
@@ -4048,7 +4048,7 @@
           <a:bodyPr/>
           <a:lstStyle/>
           <a:p>
-            <a:fld id="{7CDE3171-E54D-4D37-9CC1-8E414A51A224}" type="slidenum">
+            <a:fld id="{1FD37241-31C0-4561-AE41-B5FB1BD434D2}" type="slidenum">
               <a:rPr lang="en-US"/>
               <a:t>‹#›</a:t>
             </a:fld>
@@ -4214,7 +4214,7 @@
           <a:bodyPr/>
           <a:lstStyle/>
           <a:p>
-            <a:fld id="{824802F0-F349-45AD-96B9-B9E716AF41D1}" type="slidenum">
+            <a:fld id="{EA45FDF0-0C86-405E-ACAB-54EE3A96E923}" type="slidenum">
               <a:rPr lang="en-US"/>
               <a:t>‹#›</a:t>
             </a:fld>
@@ -4380,7 +4380,7 @@
           <a:bodyPr/>
           <a:lstStyle/>
           <a:p>
-            <a:fld id="{D16CB7DA-A014-4D3A-9A25-F7BFB6A58BC0}" type="slidenum">
+            <a:fld id="{6FAE009D-F3BE-4EC1-BD3D-012AE07D7185}" type="slidenum">
               <a:rPr lang="en-US"/>
               <a:t>‹#›</a:t>
             </a:fld>
